--- a/hearts-and-minds/journey-decks/hm-journey-overview-v1.pptx
+++ b/hearts-and-minds/journey-decks/hm-journey-overview-v1.pptx
@@ -2331,7 +2331,7 @@
       </p:sp>
       <p:pic>
         <p:nvPicPr>
-          <p:cNvPr id="8" name="Image 1" descr="/sessions/quirky-zen-galileo/mnt/outputs/hmdecks/img/abdul-portrait.jpg">    </p:cNvPr>
+          <p:cNvPr id="8" name="Image 1" descr="/sessions/quirky-zen-galileo/mnt/outputs/hmdecks5/img/abdul-portrait.jpg">    </p:cNvPr>
           <p:cNvPicPr>
             <a:picLocks noChangeAspect="1"/>
           </p:cNvPicPr>
@@ -2418,7 +2418,7 @@
       </p:sp>
       <p:pic>
         <p:nvPicPr>
-          <p:cNvPr id="11" name="Image 2" descr="/sessions/quirky-zen-galileo/mnt/outputs/hmdecks/img/adam-portrait.jpg">    </p:cNvPr>
+          <p:cNvPr id="11" name="Image 2" descr="/sessions/quirky-zen-galileo/mnt/outputs/hmdecks5/img/adam-portrait.jpg">    </p:cNvPr>
           <p:cNvPicPr>
             <a:picLocks noChangeAspect="1"/>
           </p:cNvPicPr>
@@ -2505,7 +2505,7 @@
       </p:sp>
       <p:pic>
         <p:nvPicPr>
-          <p:cNvPr id="14" name="Image 3" descr="/sessions/quirky-zen-galileo/mnt/outputs/hmdecks/img/anita-portrait.jpg">    </p:cNvPr>
+          <p:cNvPr id="14" name="Image 3" descr="/sessions/quirky-zen-galileo/mnt/outputs/hmdecks5/img/anita-portrait.jpg">    </p:cNvPr>
           <p:cNvPicPr>
             <a:picLocks noChangeAspect="1"/>
           </p:cNvPicPr>
@@ -2592,7 +2592,7 @@
       </p:sp>
       <p:pic>
         <p:nvPicPr>
-          <p:cNvPr id="17" name="Image 4" descr="/sessions/quirky-zen-galileo/mnt/outputs/hmdecks/img/catherine-portrait.jpg">    </p:cNvPr>
+          <p:cNvPr id="17" name="Image 4" descr="/sessions/quirky-zen-galileo/mnt/outputs/hmdecks5/img/catherine-portrait.jpg">    </p:cNvPr>
           <p:cNvPicPr>
             <a:picLocks noChangeAspect="1"/>
           </p:cNvPicPr>
@@ -2679,7 +2679,7 @@
       </p:sp>
       <p:pic>
         <p:nvPicPr>
-          <p:cNvPr id="20" name="Image 5" descr="/sessions/quirky-zen-galileo/mnt/outputs/hmdecks/img/devi-portrait.jpg">    </p:cNvPr>
+          <p:cNvPr id="20" name="Image 5" descr="/sessions/quirky-zen-galileo/mnt/outputs/hmdecks5/img/devi-portrait.jpg">    </p:cNvPr>
           <p:cNvPicPr>
             <a:picLocks noChangeAspect="1"/>
           </p:cNvPicPr>
@@ -2766,7 +2766,7 @@
       </p:sp>
       <p:pic>
         <p:nvPicPr>
-          <p:cNvPr id="23" name="Image 6" descr="/sessions/quirky-zen-galileo/mnt/outputs/hmdecks/img/hannah-portrait.jpg">    </p:cNvPr>
+          <p:cNvPr id="23" name="Image 6" descr="/sessions/quirky-zen-galileo/mnt/outputs/hmdecks5/img/hannah-portrait.jpg">    </p:cNvPr>
           <p:cNvPicPr>
             <a:picLocks noChangeAspect="1"/>
           </p:cNvPicPr>
@@ -2853,7 +2853,7 @@
       </p:sp>
       <p:pic>
         <p:nvPicPr>
-          <p:cNvPr id="26" name="Image 7" descr="/sessions/quirky-zen-galileo/mnt/outputs/hmdecks/img/joe-portrait.jpg">    </p:cNvPr>
+          <p:cNvPr id="26" name="Image 7" descr="/sessions/quirky-zen-galileo/mnt/outputs/hmdecks5/img/joe-portrait.jpg">    </p:cNvPr>
           <p:cNvPicPr>
             <a:picLocks noChangeAspect="1"/>
           </p:cNvPicPr>
@@ -2940,7 +2940,7 @@
       </p:sp>
       <p:pic>
         <p:nvPicPr>
-          <p:cNvPr id="29" name="Image 8" descr="/sessions/quirky-zen-galileo/mnt/outputs/hmdecks/img/layla-portrait.jpg">    </p:cNvPr>
+          <p:cNvPr id="29" name="Image 8" descr="/sessions/quirky-zen-galileo/mnt/outputs/hmdecks5/img/layla-portrait.jpg">    </p:cNvPr>
           <p:cNvPicPr>
             <a:picLocks noChangeAspect="1"/>
           </p:cNvPicPr>
@@ -3027,7 +3027,7 @@
       </p:sp>
       <p:pic>
         <p:nvPicPr>
-          <p:cNvPr id="32" name="Image 9" descr="/sessions/quirky-zen-galileo/mnt/outputs/hmdecks/img/mark-portrait.jpg">    </p:cNvPr>
+          <p:cNvPr id="32" name="Image 9" descr="/sessions/quirky-zen-galileo/mnt/outputs/hmdecks5/img/mark-portrait.jpg">    </p:cNvPr>
           <p:cNvPicPr>
             <a:picLocks noChangeAspect="1"/>
           </p:cNvPicPr>
@@ -3114,7 +3114,7 @@
       </p:sp>
       <p:pic>
         <p:nvPicPr>
-          <p:cNvPr id="35" name="Image 10" descr="/sessions/quirky-zen-galileo/mnt/outputs/hmdecks/img/ruth-portrait.jpg">    </p:cNvPr>
+          <p:cNvPr id="35" name="Image 10" descr="/sessions/quirky-zen-galileo/mnt/outputs/hmdecks5/img/ruth-portrait.jpg">    </p:cNvPr>
           <p:cNvPicPr>
             <a:picLocks noChangeAspect="1"/>
           </p:cNvPicPr>
@@ -3201,7 +3201,7 @@
       </p:sp>
       <p:pic>
         <p:nvPicPr>
-          <p:cNvPr id="38" name="Image 11" descr="/sessions/quirky-zen-galileo/mnt/outputs/hmdecks/img/sarah-portrait.jpg">    </p:cNvPr>
+          <p:cNvPr id="38" name="Image 11" descr="/sessions/quirky-zen-galileo/mnt/outputs/hmdecks5/img/sarah-portrait.jpg">    </p:cNvPr>
           <p:cNvPicPr>
             <a:picLocks noChangeAspect="1"/>
           </p:cNvPicPr>
@@ -3288,7 +3288,7 @@
       </p:sp>
       <p:pic>
         <p:nvPicPr>
-          <p:cNvPr id="41" name="Image 12" descr="/sessions/quirky-zen-galileo/mnt/outputs/hmdecks/img/sean-portrait.jpg">    </p:cNvPr>
+          <p:cNvPr id="41" name="Image 12" descr="/sessions/quirky-zen-galileo/mnt/outputs/hmdecks5/img/sean-portrait.jpg">    </p:cNvPr>
           <p:cNvPicPr>
             <a:picLocks noChangeAspect="1"/>
           </p:cNvPicPr>
@@ -14777,7 +14777,7 @@
       </p:sp>
       <p:pic>
         <p:nvPicPr>
-          <p:cNvPr id="10" name="Image 1" descr="/sessions/quirky-zen-galileo/mnt/outputs/hmdecks/img/abdul-portrait.jpg">    </p:cNvPr>
+          <p:cNvPr id="10" name="Image 1" descr="/sessions/quirky-zen-galileo/mnt/outputs/hmdecks5/img/abdul-portrait.jpg">    </p:cNvPr>
           <p:cNvPicPr>
             <a:picLocks noChangeAspect="1"/>
           </p:cNvPicPr>
@@ -15039,7 +15039,7 @@
       </p:sp>
       <p:pic>
         <p:nvPicPr>
-          <p:cNvPr id="18" name="Image 2" descr="/sessions/quirky-zen-galileo/mnt/outputs/hmdecks/img/devi-portrait.jpg">    </p:cNvPr>
+          <p:cNvPr id="18" name="Image 2" descr="/sessions/quirky-zen-galileo/mnt/outputs/hmdecks5/img/devi-portrait.jpg">    </p:cNvPr>
           <p:cNvPicPr>
             <a:picLocks noChangeAspect="1"/>
           </p:cNvPicPr>
@@ -15301,7 +15301,7 @@
       </p:sp>
       <p:pic>
         <p:nvPicPr>
-          <p:cNvPr id="26" name="Image 3" descr="/sessions/quirky-zen-galileo/mnt/outputs/hmdecks/img/layla-portrait.jpg">    </p:cNvPr>
+          <p:cNvPr id="26" name="Image 3" descr="/sessions/quirky-zen-galileo/mnt/outputs/hmdecks5/img/layla-portrait.jpg">    </p:cNvPr>
           <p:cNvPicPr>
             <a:picLocks noChangeAspect="1"/>
           </p:cNvPicPr>
@@ -15396,7 +15396,7 @@
                 <a:ea typeface="Arial" pitchFamily="34" charset="-122"/>
                 <a:cs typeface="Arial" pitchFamily="34" charset="-120"/>
               </a:rPr>
-              <a:t>Patient on iron supplementation · Primary-care monitoring cohort</a:t>
+              <a:t>GP-initiated patient · Iron deficiency anaemia · held configuration</a:t>
             </a:r>
             <a:endParaRPr lang="en-US" sz="950" dirty="0"/>
           </a:p>
@@ -15437,7 +15437,7 @@
                 <a:ea typeface="Arial" pitchFamily="34" charset="-122"/>
                 <a:cs typeface="Arial" pitchFamily="34" charset="-120"/>
               </a:rPr>
-              <a:t>A Saturday, not a sick day.</a:t>
+              <a:t>Three years on the tablets. The trend is the treatment.</a:t>
             </a:r>
             <a:endParaRPr lang="en-US" sz="1100" dirty="0"/>
           </a:p>
@@ -15478,7 +15478,7 @@
                 <a:ea typeface="Arial" pitchFamily="34" charset="-122"/>
                 <a:cs typeface="Arial" pitchFamily="34" charset="-120"/>
               </a:rPr>
-              <a:t>A patient's story through the operating model</a:t>
+              <a:t>A patient's story through the operating model, GP-initiated, told as an illustration</a:t>
             </a:r>
             <a:endParaRPr lang="en-US" sz="900" dirty="0"/>
           </a:p>
@@ -15563,7 +15563,7 @@
       </p:sp>
       <p:pic>
         <p:nvPicPr>
-          <p:cNvPr id="34" name="Image 4" descr="/sessions/quirky-zen-galileo/mnt/outputs/hmdecks/img/mark-portrait.jpg">    </p:cNvPr>
+          <p:cNvPr id="34" name="Image 4" descr="/sessions/quirky-zen-galileo/mnt/outputs/hmdecks5/img/mark-portrait.jpg">    </p:cNvPr>
           <p:cNvPicPr>
             <a:picLocks noChangeAspect="1"/>
           </p:cNvPicPr>
@@ -15825,7 +15825,7 @@
       </p:sp>
       <p:pic>
         <p:nvPicPr>
-          <p:cNvPr id="42" name="Image 5" descr="/sessions/quirky-zen-galileo/mnt/outputs/hmdecks/img/sean-portrait.jpg">    </p:cNvPr>
+          <p:cNvPr id="42" name="Image 5" descr="/sessions/quirky-zen-galileo/mnt/outputs/hmdecks5/img/sean-portrait.jpg">    </p:cNvPr>
           <p:cNvPicPr>
             <a:picLocks noChangeAspect="1"/>
           </p:cNvPicPr>
@@ -16087,7 +16087,7 @@
       </p:sp>
       <p:pic>
         <p:nvPicPr>
-          <p:cNvPr id="50" name="Image 6" descr="/sessions/quirky-zen-galileo/mnt/outputs/hmdecks/img/anita-portrait.jpg">    </p:cNvPr>
+          <p:cNvPr id="50" name="Image 6" descr="/sessions/quirky-zen-galileo/mnt/outputs/hmdecks5/img/anita-portrait.jpg">    </p:cNvPr>
           <p:cNvPicPr>
             <a:picLocks noChangeAspect="1"/>
           </p:cNvPicPr>
@@ -16650,7 +16650,7 @@
       </p:sp>
       <p:pic>
         <p:nvPicPr>
-          <p:cNvPr id="10" name="Image 1" descr="/sessions/quirky-zen-galileo/mnt/outputs/hmdecks/img/catherine-portrait.jpg">    </p:cNvPr>
+          <p:cNvPr id="10" name="Image 1" descr="/sessions/quirky-zen-galileo/mnt/outputs/hmdecks5/img/catherine-portrait.jpg">    </p:cNvPr>
           <p:cNvPicPr>
             <a:picLocks noChangeAspect="1"/>
           </p:cNvPicPr>
@@ -16912,7 +16912,7 @@
       </p:sp>
       <p:pic>
         <p:nvPicPr>
-          <p:cNvPr id="18" name="Image 2" descr="/sessions/quirky-zen-galileo/mnt/outputs/hmdecks/img/ruth-portrait.jpg">    </p:cNvPr>
+          <p:cNvPr id="18" name="Image 2" descr="/sessions/quirky-zen-galileo/mnt/outputs/hmdecks5/img/ruth-portrait.jpg">    </p:cNvPr>
           <p:cNvPicPr>
             <a:picLocks noChangeAspect="1"/>
           </p:cNvPicPr>
@@ -17174,7 +17174,7 @@
       </p:sp>
       <p:pic>
         <p:nvPicPr>
-          <p:cNvPr id="26" name="Image 3" descr="/sessions/quirky-zen-galileo/mnt/outputs/hmdecks/img/sarah-portrait.jpg">    </p:cNvPr>
+          <p:cNvPr id="26" name="Image 3" descr="/sessions/quirky-zen-galileo/mnt/outputs/hmdecks5/img/sarah-portrait.jpg">    </p:cNvPr>
           <p:cNvPicPr>
             <a:picLocks noChangeAspect="1"/>
           </p:cNvPicPr>
@@ -17436,7 +17436,7 @@
       </p:sp>
       <p:pic>
         <p:nvPicPr>
-          <p:cNvPr id="34" name="Image 4" descr="/sessions/quirky-zen-galileo/mnt/outputs/hmdecks/img/adam-portrait.jpg">    </p:cNvPr>
+          <p:cNvPr id="34" name="Image 4" descr="/sessions/quirky-zen-galileo/mnt/outputs/hmdecks5/img/adam-portrait.jpg">    </p:cNvPr>
           <p:cNvPicPr>
             <a:picLocks noChangeAspect="1"/>
           </p:cNvPicPr>
@@ -17698,7 +17698,7 @@
       </p:sp>
       <p:pic>
         <p:nvPicPr>
-          <p:cNvPr id="42" name="Image 5" descr="/sessions/quirky-zen-galileo/mnt/outputs/hmdecks/img/hannah-portrait.jpg">    </p:cNvPr>
+          <p:cNvPr id="42" name="Image 5" descr="/sessions/quirky-zen-galileo/mnt/outputs/hmdecks5/img/hannah-portrait.jpg">    </p:cNvPr>
           <p:cNvPicPr>
             <a:picLocks noChangeAspect="1"/>
           </p:cNvPicPr>
@@ -17960,7 +17960,7 @@
       </p:sp>
       <p:pic>
         <p:nvPicPr>
-          <p:cNvPr id="50" name="Image 6" descr="/sessions/quirky-zen-galileo/mnt/outputs/hmdecks/img/joe-portrait.jpg">    </p:cNvPr>
+          <p:cNvPr id="50" name="Image 6" descr="/sessions/quirky-zen-galileo/mnt/outputs/hmdecks5/img/joe-portrait.jpg">    </p:cNvPr>
           <p:cNvPicPr>
             <a:picLocks noChangeAspect="1"/>
           </p:cNvPicPr>
@@ -21866,7 +21866,7 @@
                 <a:ea typeface="Arial" pitchFamily="34" charset="-122"/>
                 <a:cs typeface="Arial" pitchFamily="34" charset="-120"/>
               </a:rPr>
-              <a:t>the cohort the clinic finds hardest to keep</a:t>
+              <a:t>a treated condition, a cycle nobody can see slipping</a:t>
             </a:r>
             <a:endParaRPr lang="en-US" sz="900" dirty="0"/>
           </a:p>
@@ -22064,7 +22064,7 @@
                 <a:ea typeface="Arial" pitchFamily="34" charset="-122"/>
                 <a:cs typeface="Arial" pitchFamily="34" charset="-120"/>
               </a:rPr>
-              <a:t>Hannah's practice flags her</a:t>
+              <a:t>the practice system orders, nobody has to ask</a:t>
             </a:r>
             <a:endParaRPr lang="en-US" sz="900" dirty="0"/>
           </a:p>
@@ -22262,7 +22262,7 @@
                 <a:ea typeface="Arial" pitchFamily="34" charset="-122"/>
                 <a:cs typeface="Arial" pitchFamily="34" charset="-120"/>
               </a:rPr>
-              <a:t>the FBC on a Saturday morning</a:t>
+              <a:t>a sample between shifts</a:t>
             </a:r>
             <a:endParaRPr lang="en-US" sz="900" dirty="0"/>
           </a:p>
@@ -22460,7 +22460,7 @@
                 <a:ea typeface="Arial" pitchFamily="34" charset="-122"/>
                 <a:cs typeface="Arial" pitchFamily="34" charset="-120"/>
               </a:rPr>
-              <a:t>the prescription adjusted on the trend</a:t>
+              <a:t>the dose follows the ferritin</a:t>
             </a:r>
             <a:endParaRPr lang="en-US" sz="900" dirty="0"/>
           </a:p>
@@ -22658,7 +22658,7 @@
                 <a:ea typeface="Arial" pitchFamily="34" charset="-122"/>
                 <a:cs typeface="Arial" pitchFamily="34" charset="-120"/>
               </a:rPr>
-              <a:t>the cycle that fits her life</a:t>
+              <a:t>silence as the good result</a:t>
             </a:r>
             <a:endParaRPr lang="en-US" sz="900" dirty="0"/>
           </a:p>
@@ -22765,7 +22765,7 @@
                 <a:ea typeface="Arial" pitchFamily="34" charset="-122"/>
                 <a:cs typeface="Arial" pitchFamily="34" charset="-120"/>
               </a:rPr>
-              <a:t>The bloods need doing. The clinic visit never needed to be the way to do them.</a:t>
+              <a:t>Known, treated, and never quietly lost.</a:t>
             </a:r>
             <a:endParaRPr lang="en-US" sz="1500" dirty="0"/>
           </a:p>
@@ -22806,7 +22806,7 @@
                 <a:ea typeface="Arial" pitchFamily="34" charset="-122"/>
                 <a:cs typeface="Arial" pitchFamily="34" charset="-120"/>
               </a:rPr>
-              <a:t>Layla has the condition. The condition needs monitoring. The clinic is where the monitoring has always happened, but the clinic is exactly the venue that does not work for her life. </a:t>
+              <a:t>Layla is not a diagnosis waiting to happen. She is a patient the system already knows and already treats. The failure mode for someone like her is not a missed screen but a missed check: a six-month cycle that slips to nine, then twelve, while the iron dose that was right three years ago quietly stops being right. </a:t>
             </a:r>
             <a:pPr indent="0" marL="0">
               <a:buNone/>
@@ -22820,7 +22820,7 @@
                 <a:ea typeface="Arial" pitchFamily="34" charset="-122"/>
                 <a:cs typeface="Arial" pitchFamily="34" charset="-120"/>
               </a:rPr>
-              <a:t>Move the venue. Keep the monitoring.</a:t>
+              <a:t>Hold the cycle and you hold the treatment.</a:t>
             </a:r>
             <a:endParaRPr lang="en-US" sz="1100" dirty="0"/>
           </a:p>
@@ -22927,7 +22927,7 @@
                 <a:ea typeface="Arial" pitchFamily="34" charset="-122"/>
                 <a:cs typeface="Arial" pitchFamily="34" charset="-120"/>
               </a:rPr>
-              <a:t>No half-day off. No childcare juggle. No DNA letter saying she is the problem.</a:t>
+              <a:t>Her hours change every week. The kit does not care.</a:t>
             </a:r>
             <a:endParaRPr lang="en-US" sz="1500" dirty="0"/>
           </a:p>
@@ -22968,7 +22968,7 @@
                 <a:ea typeface="Arial" pitchFamily="34" charset="-122"/>
                 <a:cs typeface="Arial" pitchFamily="34" charset="-120"/>
               </a:rPr>
-              <a:t>A Saturday-morning sample. The result back in Hannah's system on time. The next iron prescription unchanged or adjusted as the trend says. </a:t>
+              <a:t>Two part-time jobs, one on a rota that moves, mean a fixed clinic slot is a bet against her own timetable, and an hour in a waiting room is an hour she is not paid for. A kit that arrives when the cycle is due and gets taken between shifts costs her nothing she cannot spare. </a:t>
             </a:r>
             <a:pPr indent="0" marL="0">
               <a:buNone/>
@@ -22982,7 +22982,7 @@
                 <a:ea typeface="Arial" pitchFamily="34" charset="-122"/>
                 <a:cs typeface="Arial" pitchFamily="34" charset="-120"/>
               </a:rPr>
-              <a:t>The system stops blaming her for the venue being wrong.</a:t>
+              <a:t>The result goes to Hannah. Layla hears from the practice only if the dose needs to change.</a:t>
             </a:r>
             <a:endParaRPr lang="en-US" sz="1100" dirty="0"/>
           </a:p>
